--- a/Actividad 5.1 ProyectoIntegrador_JoseGomez_Sim_5SM.pptx
+++ b/Actividad 5.1 ProyectoIntegrador_JoseGomez_Sim_5SM.pptx
@@ -2686,15 +2686,22 @@
         </p:nvSpPr>
         <p:spPr>
           <a:xfrm>
-            <a:off x="0" y="0"/>
+            <a:off x="-635" y="0"/>
             <a:ext cx="12191695" cy="6858000"/>
           </a:xfrm>
           <a:prstGeom prst="rect">
             <a:avLst/>
           </a:prstGeom>
-          <a:solidFill>
-            <a:srgbClr val="1A237E"/>
-          </a:solidFill>
+          <a:noFill/>
+          <a:extLst>
+            <a:ext uri="{909E8E84-426E-40DD-AFC4-6F175D3DCCD1}">
+              <a14:hiddenFill xmlns:a14="http://schemas.microsoft.com/office/drawing/2010/main">
+                <a:solidFill>
+                  <a:schemeClr val="accent1"/>
+                </a:solidFill>
+              </a14:hiddenFill>
+            </a:ext>
+          </a:extLst>
         </p:spPr>
       </p:sp>
       <p:sp>
@@ -2705,7 +2712,7 @@
         </p:nvSpPr>
         <p:spPr>
           <a:xfrm>
-            <a:off x="731520" y="1188720"/>
+            <a:off x="661035" y="1927225"/>
             <a:ext cx="10698480" cy="365760"/>
           </a:xfrm>
           <a:prstGeom prst="rect">
@@ -2721,9 +2728,20 @@
               <a:buNone/>
             </a:pPr>
             <a:r>
+              <a:rPr lang="es-MX" altLang="en-US" sz="1600" b="1" dirty="0">
+                <a:solidFill>
+                  <a:schemeClr val="tx1"/>
+                </a:solidFill>
+                <a:latin typeface="Arial" panose="020B0604020202020204" pitchFamily="34" charset="0"/>
+                <a:ea typeface="Arial" panose="020B0604020202020204" pitchFamily="34" charset="-122"/>
+                <a:cs typeface="Arial" panose="020B0604020202020204" pitchFamily="34" charset="-120"/>
+              </a:rPr>
+              <a:t>5.1 </a:t>
+            </a:r>
+            <a:r>
               <a:rPr lang="en-US" sz="1600" b="1" dirty="0">
                 <a:solidFill>
-                  <a:srgbClr val="C5CAE9"/>
+                  <a:schemeClr val="tx1"/>
                 </a:solidFill>
                 <a:latin typeface="Arial" panose="020B0604020202020204" pitchFamily="34" charset="0"/>
                 <a:ea typeface="Arial" panose="020B0604020202020204" pitchFamily="34" charset="-122"/>
@@ -2731,7 +2749,14 @@
               </a:rPr>
               <a:t>PROYECTO INTEGRADOR</a:t>
             </a:r>
-            <a:endParaRPr lang="en-US" sz="1600" dirty="0"/>
+            <a:endParaRPr lang="en-US" sz="1600" b="1" dirty="0">
+              <a:solidFill>
+                <a:schemeClr val="tx1"/>
+              </a:solidFill>
+              <a:latin typeface="Arial" panose="020B0604020202020204" pitchFamily="34" charset="0"/>
+              <a:ea typeface="Arial" panose="020B0604020202020204" pitchFamily="34" charset="-122"/>
+              <a:cs typeface="Arial" panose="020B0604020202020204" pitchFamily="34" charset="-120"/>
+            </a:endParaRPr>
           </a:p>
         </p:txBody>
       </p:sp>
@@ -2743,8 +2768,8 @@
         </p:nvSpPr>
         <p:spPr>
           <a:xfrm>
-            <a:off x="731520" y="1737360"/>
-            <a:ext cx="10698480" cy="1005840"/>
+            <a:off x="746125" y="2327275"/>
+            <a:ext cx="10698480" cy="767080"/>
           </a:xfrm>
           <a:prstGeom prst="rect">
             <a:avLst/>
@@ -2759,9 +2784,9 @@
               <a:buNone/>
             </a:pPr>
             <a:r>
-              <a:rPr lang="en-US" sz="2800" b="1" dirty="0">
-                <a:solidFill>
-                  <a:srgbClr val="FFFFFF"/>
+              <a:rPr lang="en-US" b="1" dirty="0">
+                <a:solidFill>
+                  <a:schemeClr val="tx1"/>
                 </a:solidFill>
                 <a:latin typeface="Arial" panose="020B0604020202020204" pitchFamily="34" charset="0"/>
                 <a:ea typeface="Arial" panose="020B0604020202020204" pitchFamily="34" charset="-122"/>
@@ -2769,16 +2794,20 @@
               </a:rPr>
               <a:t>Simulación del proceso productivo</a:t>
             </a:r>
-            <a:endParaRPr lang="en-US" sz="2800" dirty="0"/>
+            <a:endParaRPr lang="en-US" dirty="0">
+              <a:solidFill>
+                <a:schemeClr val="tx1"/>
+              </a:solidFill>
+            </a:endParaRPr>
           </a:p>
           <a:p>
             <a:pPr marL="0" indent="0" algn="ctr">
               <a:buNone/>
             </a:pPr>
             <a:r>
-              <a:rPr lang="en-US" sz="2800" b="1" dirty="0">
-                <a:solidFill>
-                  <a:srgbClr val="FFFFFF"/>
+              <a:rPr lang="en-US" b="1" dirty="0">
+                <a:solidFill>
+                  <a:schemeClr val="tx1"/>
                 </a:solidFill>
                 <a:latin typeface="Arial" panose="020B0604020202020204" pitchFamily="34" charset="0"/>
                 <a:ea typeface="Arial" panose="020B0604020202020204" pitchFamily="34" charset="-122"/>
@@ -2786,7 +2815,14 @@
               </a:rPr>
               <a:t>de la Industria Bloquera del Sureste</a:t>
             </a:r>
-            <a:endParaRPr lang="en-US" sz="2800" dirty="0"/>
+            <a:endParaRPr lang="en-US" b="1" dirty="0">
+              <a:solidFill>
+                <a:schemeClr val="tx1"/>
+              </a:solidFill>
+              <a:latin typeface="Arial" panose="020B0604020202020204" pitchFamily="34" charset="0"/>
+              <a:ea typeface="Arial" panose="020B0604020202020204" pitchFamily="34" charset="-122"/>
+              <a:cs typeface="Arial" panose="020B0604020202020204" pitchFamily="34" charset="-120"/>
+            </a:endParaRPr>
           </a:p>
         </p:txBody>
       </p:sp>
@@ -2798,7 +2834,7 @@
         </p:nvSpPr>
         <p:spPr>
           <a:xfrm>
-            <a:off x="731520" y="3017520"/>
+            <a:off x="661035" y="3129280"/>
             <a:ext cx="10698480" cy="640080"/>
           </a:xfrm>
           <a:prstGeom prst="rect">
@@ -2816,7 +2852,7 @@
             <a:r>
               <a:rPr lang="en-US" sz="1500" dirty="0">
                 <a:solidFill>
-                  <a:srgbClr val="C5CAE9"/>
+                  <a:schemeClr val="tx1"/>
                 </a:solidFill>
                 <a:latin typeface="Arial" panose="020B0604020202020204" pitchFamily="34" charset="0"/>
                 <a:ea typeface="Arial" panose="020B0604020202020204" pitchFamily="34" charset="-122"/>
@@ -2824,7 +2860,11 @@
               </a:rPr>
               <a:t>Manual de usuario y Manual de desarrollador</a:t>
             </a:r>
-            <a:endParaRPr lang="en-US" sz="1500" dirty="0"/>
+            <a:endParaRPr lang="en-US" sz="1500" dirty="0">
+              <a:solidFill>
+                <a:schemeClr val="tx1"/>
+              </a:solidFill>
+            </a:endParaRPr>
           </a:p>
           <a:p>
             <a:pPr marL="0" indent="0" algn="ctr">
@@ -2833,7 +2873,7 @@
             <a:r>
               <a:rPr lang="en-US" sz="1500" dirty="0">
                 <a:solidFill>
-                  <a:srgbClr val="C5CAE9"/>
+                  <a:schemeClr val="tx1"/>
                 </a:solidFill>
                 <a:latin typeface="Arial" panose="020B0604020202020204" pitchFamily="34" charset="0"/>
                 <a:ea typeface="Arial" panose="020B0604020202020204" pitchFamily="34" charset="-122"/>
@@ -2841,7 +2881,14 @@
               </a:rPr>
               <a:t>JavaFX · Camunda · Bonita · Bizagi</a:t>
             </a:r>
-            <a:endParaRPr lang="en-US" sz="1500" dirty="0"/>
+            <a:endParaRPr lang="en-US" sz="1500" dirty="0">
+              <a:solidFill>
+                <a:schemeClr val="tx1"/>
+              </a:solidFill>
+              <a:latin typeface="Arial" panose="020B0604020202020204" pitchFamily="34" charset="0"/>
+              <a:ea typeface="Arial" panose="020B0604020202020204" pitchFamily="34" charset="-122"/>
+              <a:cs typeface="Arial" panose="020B0604020202020204" pitchFamily="34" charset="-120"/>
+            </a:endParaRPr>
           </a:p>
         </p:txBody>
       </p:sp>
@@ -2853,7 +2900,86 @@
         </p:nvSpPr>
         <p:spPr>
           <a:xfrm>
-            <a:off x="731520" y="3931920"/>
+            <a:off x="985520" y="3940810"/>
+            <a:ext cx="10698480" cy="537210"/>
+          </a:xfrm>
+          <a:prstGeom prst="rect">
+            <a:avLst/>
+          </a:prstGeom>
+          <a:noFill/>
+        </p:spPr>
+        <p:txBody>
+          <a:bodyPr wrap="square" rtlCol="0" anchor="ctr"/>
+          <a:lstStyle/>
+          <a:p>
+            <a:pPr marL="0" indent="0" algn="ctr">
+              <a:buNone/>
+            </a:pPr>
+            <a:r>
+              <a:rPr lang="en-US" sz="1600" b="1" dirty="0">
+                <a:solidFill>
+                  <a:schemeClr val="tx1"/>
+                </a:solidFill>
+                <a:latin typeface="Arial" panose="020B0604020202020204" pitchFamily="34" charset="0"/>
+                <a:ea typeface="Arial" panose="020B0604020202020204" pitchFamily="34" charset="-122"/>
+                <a:cs typeface="Arial" panose="020B0604020202020204" pitchFamily="34" charset="-120"/>
+              </a:rPr>
+              <a:t>Asignatura: Simulación (SCD-1022)</a:t>
+            </a:r>
+            <a:endParaRPr lang="en-US" sz="1600" b="1" dirty="0">
+              <a:solidFill>
+                <a:schemeClr val="tx1"/>
+              </a:solidFill>
+              <a:latin typeface="Arial" panose="020B0604020202020204" pitchFamily="34" charset="0"/>
+              <a:ea typeface="Arial" panose="020B0604020202020204" pitchFamily="34" charset="-122"/>
+              <a:cs typeface="Arial" panose="020B0604020202020204" pitchFamily="34" charset="-120"/>
+            </a:endParaRPr>
+          </a:p>
+          <a:p>
+            <a:pPr marL="0" indent="0" algn="ctr">
+              <a:buNone/>
+            </a:pPr>
+            <a:endParaRPr lang="en-US" sz="1300" dirty="0">
+              <a:solidFill>
+                <a:schemeClr val="tx1"/>
+              </a:solidFill>
+            </a:endParaRPr>
+          </a:p>
+          <a:p>
+            <a:pPr marL="0" indent="0" algn="ctr">
+              <a:buNone/>
+            </a:pPr>
+            <a:r>
+              <a:rPr lang="en-US" sz="1300" dirty="0">
+                <a:solidFill>
+                  <a:schemeClr val="tx1"/>
+                </a:solidFill>
+                <a:latin typeface="Arial" panose="020B0604020202020204" pitchFamily="34" charset="0"/>
+                <a:ea typeface="Arial" panose="020B0604020202020204" pitchFamily="34" charset="-122"/>
+                <a:cs typeface="Arial" panose="020B0604020202020204" pitchFamily="34" charset="-120"/>
+              </a:rPr>
+              <a:t> · </a:t>
+            </a:r>
+            <a:endParaRPr lang="en-US" sz="1300" dirty="0">
+              <a:solidFill>
+                <a:schemeClr val="tx1"/>
+              </a:solidFill>
+              <a:latin typeface="Arial" panose="020B0604020202020204" pitchFamily="34" charset="0"/>
+              <a:ea typeface="Arial" panose="020B0604020202020204" pitchFamily="34" charset="-122"/>
+              <a:cs typeface="Arial" panose="020B0604020202020204" pitchFamily="34" charset="-120"/>
+            </a:endParaRPr>
+          </a:p>
+        </p:txBody>
+      </p:sp>
+      <p:sp>
+        <p:nvSpPr>
+          <p:cNvPr id="7" name="Text 5"/>
+          <p:cNvSpPr/>
+          <p:nvPr/>
+        </p:nvSpPr>
+        <p:spPr>
+          <a:xfrm>
+            <a:off x="985520" y="5288915"/>
             <a:ext cx="10698480" cy="548640"/>
           </a:xfrm>
           <a:prstGeom prst="rect">
@@ -2869,47 +2995,282 @@
               <a:buNone/>
             </a:pPr>
             <a:r>
-              <a:rPr lang="en-US" sz="1300" dirty="0">
-                <a:solidFill>
-                  <a:srgbClr val="9FA8DA"/>
-                </a:solidFill>
-                <a:latin typeface="Arial" panose="020B0604020202020204" pitchFamily="34" charset="0"/>
-                <a:ea typeface="Arial" panose="020B0604020202020204" pitchFamily="34" charset="-122"/>
-                <a:cs typeface="Arial" panose="020B0604020202020204" pitchFamily="34" charset="-120"/>
-              </a:rPr>
-              <a:t>Asignatura: Simulación (SCD-1022)</a:t>
-            </a:r>
-            <a:endParaRPr lang="en-US" sz="1300" dirty="0"/>
-          </a:p>
+              <a:rPr lang="en-US" sz="1600" b="1" dirty="0">
+                <a:solidFill>
+                  <a:schemeClr val="tx1"/>
+                </a:solidFill>
+                <a:latin typeface="Arial" panose="020B0604020202020204" pitchFamily="34" charset="0"/>
+                <a:ea typeface="Arial" panose="020B0604020202020204" pitchFamily="34" charset="-122"/>
+                <a:cs typeface="Arial" panose="020B0604020202020204" pitchFamily="34" charset="-120"/>
+              </a:rPr>
+              <a:t>Project Manager: Amaury Jahaziel Gordillo Hernández</a:t>
+            </a:r>
+            <a:endParaRPr lang="en-US" sz="1600" b="1" dirty="0">
+              <a:solidFill>
+                <a:schemeClr val="tx1"/>
+              </a:solidFill>
+              <a:latin typeface="Arial" panose="020B0604020202020204" pitchFamily="34" charset="0"/>
+              <a:ea typeface="Arial" panose="020B0604020202020204" pitchFamily="34" charset="-122"/>
+              <a:cs typeface="Arial" panose="020B0604020202020204" pitchFamily="34" charset="-120"/>
+            </a:endParaRPr>
+          </a:p>
+        </p:txBody>
+      </p:sp>
+      <p:pic>
+        <p:nvPicPr>
+          <p:cNvPr id="13" name="Imagen 12"/>
+          <p:cNvPicPr>
+            <a:picLocks noChangeAspect="1"/>
+          </p:cNvPicPr>
+          <p:nvPr/>
+        </p:nvPicPr>
+        <p:blipFill rotWithShape="1">
+          <a:blip r:embed="rId1" cstate="print"/>
+          <a:srcRect/>
+          <a:stretch>
+            <a:fillRect/>
+          </a:stretch>
+        </p:blipFill>
+        <p:spPr bwMode="auto">
+          <a:xfrm>
+            <a:off x="176530" y="236220"/>
+            <a:ext cx="1516380" cy="1089660"/>
+          </a:xfrm>
+          <a:prstGeom prst="rect">
+            <a:avLst/>
+          </a:prstGeom>
+          <a:noFill/>
+          <a:ln>
+            <a:noFill/>
+          </a:ln>
+        </p:spPr>
+      </p:pic>
+      <p:sp>
+        <p:nvSpPr>
+          <p:cNvPr id="15" name="CuadroTexto 13"/>
+          <p:cNvSpPr txBox="1"/>
+          <p:nvPr/>
+        </p:nvSpPr>
+        <p:spPr>
+          <a:xfrm>
+            <a:off x="2160905" y="342265"/>
+            <a:ext cx="7124700" cy="983615"/>
+          </a:xfrm>
+          <a:prstGeom prst="rect">
+            <a:avLst/>
+          </a:prstGeom>
+          <a:noFill/>
+        </p:spPr>
+        <p:txBody>
+          <a:bodyPr wrap="square">
+            <a:spAutoFit/>
+          </a:bodyPr>
+          <a:lstStyle/>
+          <a:p>
+            <a:pPr algn="ctr">
+              <a:lnSpc>
+                <a:spcPct val="107000"/>
+              </a:lnSpc>
+              <a:spcAft>
+                <a:spcPts val="800"/>
+              </a:spcAft>
+              <a:buNone/>
+            </a:pPr>
+            <a:r>
+              <a:rPr lang="es-MX" sz="2800" b="1" kern="100" dirty="0">
+                <a:effectLst/>
+                <a:latin typeface="Arial" panose="020B0604020202020204" pitchFamily="34" charset="0"/>
+                <a:ea typeface="Calibri" panose="020F0502020204030204" charset="0"/>
+                <a:cs typeface="Times New Roman" panose="02020603050405020304" pitchFamily="18" charset="0"/>
+              </a:rPr>
+              <a:t>TECNOLÓGICO NACIONAL DE MÉXICO</a:t>
+            </a:r>
+            <a:endParaRPr lang="es-MX" sz="2000" kern="100" dirty="0">
+              <a:effectLst/>
+              <a:latin typeface="Arial" panose="020B0604020202020204" pitchFamily="34" charset="0"/>
+              <a:ea typeface="Calibri" panose="020F0502020204030204" charset="0"/>
+              <a:cs typeface="Times New Roman" panose="02020603050405020304" pitchFamily="18" charset="0"/>
+            </a:endParaRPr>
+          </a:p>
+          <a:p>
+            <a:pPr algn="ctr">
+              <a:lnSpc>
+                <a:spcPct val="107000"/>
+              </a:lnSpc>
+              <a:spcAft>
+                <a:spcPts val="800"/>
+              </a:spcAft>
+              <a:buNone/>
+            </a:pPr>
+            <a:r>
+              <a:rPr lang="es-MX" sz="2000" b="1" kern="100" dirty="0">
+                <a:effectLst/>
+                <a:latin typeface="Arial" panose="020B0604020202020204" pitchFamily="34" charset="0"/>
+                <a:ea typeface="Calibri" panose="020F0502020204030204" charset="0"/>
+                <a:cs typeface="Times New Roman" panose="02020603050405020304" pitchFamily="18" charset="0"/>
+              </a:rPr>
+              <a:t>UNIDAD ACADÉMICA VENUSTIANO CARRANZA</a:t>
+            </a:r>
+            <a:endParaRPr lang="es-MX" sz="2000" b="1" kern="100" dirty="0">
+              <a:effectLst/>
+              <a:latin typeface="Arial" panose="020B0604020202020204" pitchFamily="34" charset="0"/>
+              <a:ea typeface="Calibri" panose="020F0502020204030204" charset="0"/>
+              <a:cs typeface="Times New Roman" panose="02020603050405020304" pitchFamily="18" charset="0"/>
+            </a:endParaRPr>
+          </a:p>
+        </p:txBody>
+      </p:sp>
+      <p:pic>
+        <p:nvPicPr>
+          <p:cNvPr id="22" name="Imagen 21" descr="Logotipo&#10;&#10;Descripción generada automáticamente"/>
+          <p:cNvPicPr>
+            <a:picLocks noChangeAspect="1"/>
+          </p:cNvPicPr>
+          <p:nvPr/>
+        </p:nvPicPr>
+        <p:blipFill>
+          <a:blip r:embed="rId2" cstate="print"/>
+          <a:srcRect/>
+          <a:stretch>
+            <a:fillRect/>
+          </a:stretch>
+        </p:blipFill>
+        <p:spPr bwMode="auto">
+          <a:xfrm>
+            <a:off x="9382125" y="236220"/>
+            <a:ext cx="2301875" cy="1016000"/>
+          </a:xfrm>
+          <a:prstGeom prst="rect">
+            <a:avLst/>
+          </a:prstGeom>
+          <a:noFill/>
+          <a:ln>
+            <a:noFill/>
+          </a:ln>
+        </p:spPr>
+      </p:pic>
+      <p:sp>
+        <p:nvSpPr>
+          <p:cNvPr id="21" name="CuadroTexto 15"/>
+          <p:cNvSpPr txBox="1"/>
+          <p:nvPr/>
+        </p:nvSpPr>
+        <p:spPr>
+          <a:xfrm>
+            <a:off x="2675154" y="1413183"/>
+            <a:ext cx="6096000" cy="321310"/>
+          </a:xfrm>
+          <a:prstGeom prst="rect">
+            <a:avLst/>
+          </a:prstGeom>
+          <a:noFill/>
+        </p:spPr>
+        <p:txBody>
+          <a:bodyPr wrap="square">
+            <a:spAutoFit/>
+          </a:bodyPr>
+          <a:lstStyle/>
+          <a:p>
+            <a:pPr algn="ctr">
+              <a:lnSpc>
+                <a:spcPct val="107000"/>
+              </a:lnSpc>
+              <a:spcAft>
+                <a:spcPts val="800"/>
+              </a:spcAft>
+              <a:buNone/>
+            </a:pPr>
+            <a:r>
+              <a:rPr lang="en-US" sz="1400" b="1" kern="0" dirty="0">
+                <a:effectLst/>
+                <a:latin typeface="Arial" panose="020B0604020202020204" pitchFamily="34" charset="0"/>
+                <a:ea typeface="Arial" panose="020B0604020202020204" pitchFamily="34" charset="0"/>
+                <a:cs typeface="Arial" panose="020B0604020202020204" pitchFamily="34" charset="0"/>
+              </a:rPr>
+              <a:t>“</a:t>
+            </a:r>
+            <a:r>
+              <a:rPr lang="es-MX" sz="1400" b="1" kern="0" dirty="0">
+                <a:effectLst/>
+                <a:latin typeface="Arial" panose="020B0604020202020204" pitchFamily="34" charset="0"/>
+                <a:ea typeface="Times New Roman" panose="02020603050405020304" pitchFamily="18" charset="0"/>
+                <a:cs typeface="Arial" panose="020B0604020202020204" pitchFamily="34" charset="0"/>
+              </a:rPr>
+              <a:t>INGENIERÍA EN SISTEMAS COMPUTACIONALES</a:t>
+            </a:r>
+            <a:r>
+              <a:rPr lang="en-US" sz="1400" b="1" kern="0" dirty="0">
+                <a:effectLst/>
+                <a:latin typeface="Arial" panose="020B0604020202020204" pitchFamily="34" charset="0"/>
+                <a:ea typeface="Arial" panose="020B0604020202020204" pitchFamily="34" charset="0"/>
+                <a:cs typeface="Arial" panose="020B0604020202020204" pitchFamily="34" charset="0"/>
+              </a:rPr>
+              <a:t>”</a:t>
+            </a:r>
+            <a:endParaRPr lang="en-US" sz="1400" b="1" kern="0" dirty="0">
+              <a:effectLst/>
+              <a:latin typeface="Arial" panose="020B0604020202020204" pitchFamily="34" charset="0"/>
+              <a:ea typeface="Arial" panose="020B0604020202020204" pitchFamily="34" charset="0"/>
+              <a:cs typeface="Arial" panose="020B0604020202020204" pitchFamily="34" charset="0"/>
+            </a:endParaRPr>
+          </a:p>
+        </p:txBody>
+      </p:sp>
+      <p:sp>
+        <p:nvSpPr>
+          <p:cNvPr id="16" name="Text 13"/>
+          <p:cNvSpPr/>
+          <p:nvPr/>
+        </p:nvSpPr>
+        <p:spPr>
+          <a:xfrm>
+            <a:off x="2003425" y="4401185"/>
+            <a:ext cx="8229600" cy="256032"/>
+          </a:xfrm>
+          <a:prstGeom prst="rect">
+            <a:avLst/>
+          </a:prstGeom>
+          <a:noFill/>
+        </p:spPr>
+        <p:txBody>
+          <a:bodyPr wrap="square" rtlCol="0" anchor="ctr"/>
+          <a:lstStyle/>
           <a:p>
             <a:pPr marL="0" indent="0" algn="ctr">
               <a:buNone/>
             </a:pPr>
             <a:r>
-              <a:rPr lang="en-US" sz="1300" dirty="0">
-                <a:solidFill>
-                  <a:srgbClr val="9FA8DA"/>
-                </a:solidFill>
-                <a:latin typeface="Arial" panose="020B0604020202020204" pitchFamily="34" charset="0"/>
-                <a:ea typeface="Arial" panose="020B0604020202020204" pitchFamily="34" charset="-122"/>
-                <a:cs typeface="Arial" panose="020B0604020202020204" pitchFamily="34" charset="-120"/>
-              </a:rPr>
-              <a:t>Tecnológico Nacional de México · Agosto–Diciembre 2026</a:t>
-            </a:r>
-            <a:endParaRPr lang="en-US" sz="1300" dirty="0"/>
-          </a:p>
-        </p:txBody>
-      </p:sp>
-      <p:sp>
-        <p:nvSpPr>
-          <p:cNvPr id="7" name="Text 5"/>
-          <p:cNvSpPr/>
-          <p:nvPr/>
-        </p:nvSpPr>
-        <p:spPr>
-          <a:xfrm>
-            <a:off x="731520" y="4846320"/>
-            <a:ext cx="10698480" cy="548640"/>
+              <a:rPr lang="en-US" b="1" dirty="0">
+                <a:solidFill>
+                  <a:schemeClr val="tx1"/>
+                </a:solidFill>
+                <a:latin typeface="Calibri" panose="020F0502020204030204" charset="0"/>
+                <a:ea typeface="Calibri" panose="020F0502020204030204" pitchFamily="34" charset="-122"/>
+                <a:cs typeface="Calibri" panose="020F0502020204030204" pitchFamily="34" charset="-120"/>
+              </a:rPr>
+              <a:t>DOCENTE: Ing. Francisco Javier Mingo Velázquez</a:t>
+            </a:r>
+            <a:endParaRPr lang="en-US" b="1" dirty="0">
+              <a:solidFill>
+                <a:schemeClr val="tx1"/>
+              </a:solidFill>
+              <a:latin typeface="Calibri" panose="020F0502020204030204" charset="0"/>
+              <a:ea typeface="Calibri" panose="020F0502020204030204" pitchFamily="34" charset="-122"/>
+              <a:cs typeface="Calibri" panose="020F0502020204030204" pitchFamily="34" charset="-120"/>
+            </a:endParaRPr>
+          </a:p>
+        </p:txBody>
+      </p:sp>
+      <p:sp>
+        <p:nvSpPr>
+          <p:cNvPr id="17" name="Text 14"/>
+          <p:cNvSpPr/>
+          <p:nvPr/>
+        </p:nvSpPr>
+        <p:spPr>
+          <a:xfrm>
+            <a:off x="2160905" y="4867275"/>
+            <a:ext cx="8229600" cy="256032"/>
           </a:xfrm>
           <a:prstGeom prst="rect">
             <a:avLst/>
@@ -2924,34 +3285,102 @@
               <a:buNone/>
             </a:pPr>
             <a:r>
-              <a:rPr lang="en-US" sz="1400" dirty="0">
-                <a:solidFill>
-                  <a:srgbClr val="FFFFFF"/>
-                </a:solidFill>
-                <a:latin typeface="Arial" panose="020B0604020202020204" pitchFamily="34" charset="0"/>
-                <a:ea typeface="Arial" panose="020B0604020202020204" pitchFamily="34" charset="-122"/>
-                <a:cs typeface="Arial" panose="020B0604020202020204" pitchFamily="34" charset="-120"/>
-              </a:rPr>
-              <a:t>Alumno: José Ángel Gómez Rincón</a:t>
-            </a:r>
-            <a:endParaRPr lang="en-US" sz="1400" dirty="0"/>
-          </a:p>
+              <a:rPr lang="en-US" sz="1400" b="1" dirty="0">
+                <a:solidFill>
+                  <a:schemeClr val="tx1"/>
+                </a:solidFill>
+                <a:latin typeface="Arial" panose="020B0604020202020204" pitchFamily="34" charset="0"/>
+                <a:ea typeface="Calibri" panose="020F0502020204030204" pitchFamily="34" charset="-122"/>
+                <a:cs typeface="Arial" panose="020B0604020202020204" pitchFamily="34" charset="0"/>
+              </a:rPr>
+              <a:t>PRESENTA: José Ángel Gómez Rincón  |  Matrícula: 241260049  |  Semestre: Quinto</a:t>
+            </a:r>
+            <a:endParaRPr lang="en-US" sz="1400" b="1" dirty="0">
+              <a:solidFill>
+                <a:schemeClr val="tx1"/>
+              </a:solidFill>
+              <a:latin typeface="Arial" panose="020B0604020202020204" pitchFamily="34" charset="0"/>
+              <a:ea typeface="Calibri" panose="020F0502020204030204" pitchFamily="34" charset="-122"/>
+              <a:cs typeface="Arial" panose="020B0604020202020204" pitchFamily="34" charset="0"/>
+            </a:endParaRPr>
+          </a:p>
+        </p:txBody>
+      </p:sp>
+      <p:sp>
+        <p:nvSpPr>
+          <p:cNvPr id="18" name="Text 15"/>
+          <p:cNvSpPr/>
+          <p:nvPr/>
+        </p:nvSpPr>
+        <p:spPr>
+          <a:xfrm>
+            <a:off x="1895475" y="5890895"/>
+            <a:ext cx="8229600" cy="228600"/>
+          </a:xfrm>
+          <a:prstGeom prst="rect">
+            <a:avLst/>
+          </a:prstGeom>
+          <a:noFill/>
+        </p:spPr>
+        <p:txBody>
+          <a:bodyPr wrap="square" rtlCol="0" anchor="ctr"/>
+          <a:lstStyle/>
           <a:p>
             <a:pPr marL="0" indent="0" algn="ctr">
               <a:buNone/>
             </a:pPr>
             <a:r>
-              <a:rPr lang="en-US" sz="1400" dirty="0">
-                <a:solidFill>
-                  <a:srgbClr val="FFFFFF"/>
-                </a:solidFill>
-                <a:latin typeface="Arial" panose="020B0604020202020204" pitchFamily="34" charset="0"/>
-                <a:ea typeface="Arial" panose="020B0604020202020204" pitchFamily="34" charset="-122"/>
-                <a:cs typeface="Arial" panose="020B0604020202020204" pitchFamily="34" charset="-120"/>
-              </a:rPr>
-              <a:t>Project Manager: Amaury Jahaziel Gordillo Hernández</a:t>
-            </a:r>
-            <a:endParaRPr lang="en-US" sz="1400" dirty="0"/>
+              <a:rPr lang="es-MX" altLang="en-US" sz="1200" dirty="0">
+                <a:solidFill>
+                  <a:schemeClr val="tx1"/>
+                </a:solidFill>
+                <a:latin typeface="Calibri" panose="020F0502020204030204" charset="0"/>
+                <a:ea typeface="Calibri" panose="020F0502020204030204" pitchFamily="34" charset="-122"/>
+                <a:cs typeface="Calibri" panose="020F0502020204030204" pitchFamily="34" charset="-120"/>
+              </a:rPr>
+              <a:t>04 </a:t>
+            </a:r>
+            <a:r>
+              <a:rPr lang="en-US" sz="1200" dirty="0">
+                <a:solidFill>
+                  <a:schemeClr val="tx1"/>
+                </a:solidFill>
+                <a:latin typeface="Calibri" panose="020F0502020204030204" charset="0"/>
+                <a:ea typeface="Calibri" panose="020F0502020204030204" pitchFamily="34" charset="-122"/>
+                <a:cs typeface="Calibri" panose="020F0502020204030204" pitchFamily="34" charset="-120"/>
+              </a:rPr>
+              <a:t> de </a:t>
+            </a:r>
+            <a:r>
+              <a:rPr lang="es-MX" altLang="en-US" sz="1200" dirty="0">
+                <a:solidFill>
+                  <a:schemeClr val="tx1"/>
+                </a:solidFill>
+                <a:latin typeface="Calibri" panose="020F0502020204030204" charset="0"/>
+                <a:ea typeface="Calibri" panose="020F0502020204030204" pitchFamily="34" charset="-122"/>
+                <a:cs typeface="Calibri" panose="020F0502020204030204" pitchFamily="34" charset="-120"/>
+              </a:rPr>
+              <a:t>10</a:t>
+            </a:r>
+            <a:r>
+              <a:rPr lang="en-US" sz="1200" dirty="0">
+                <a:solidFill>
+                  <a:schemeClr val="tx1"/>
+                </a:solidFill>
+                <a:latin typeface="Calibri" panose="020F0502020204030204" charset="0"/>
+                <a:ea typeface="Calibri" panose="020F0502020204030204" pitchFamily="34" charset="-122"/>
+                <a:cs typeface="Calibri" panose="020F0502020204030204" pitchFamily="34" charset="-120"/>
+              </a:rPr>
+              <a:t> de 2026  ·  Venustiano Carranza, Chiapas</a:t>
+            </a:r>
+            <a:endParaRPr lang="en-US" sz="1200" dirty="0">
+              <a:solidFill>
+                <a:schemeClr val="tx1"/>
+              </a:solidFill>
+              <a:latin typeface="Calibri" panose="020F0502020204030204" charset="0"/>
+              <a:ea typeface="Calibri" panose="020F0502020204030204" pitchFamily="34" charset="-122"/>
+              <a:cs typeface="Calibri" panose="020F0502020204030204" pitchFamily="34" charset="-120"/>
+            </a:endParaRPr>
           </a:p>
         </p:txBody>
       </p:sp>
@@ -11325,7 +11754,29 @@
                 <a:ea typeface="Arial" panose="020B0604020202020204" pitchFamily="34" charset="-122"/>
                 <a:cs typeface="Arial" panose="020B0604020202020204" pitchFamily="34" charset="-120"/>
               </a:rPr>
-              <a:t>20. Anexo · Control de versiones con Git</a:t>
+              <a:t>20. Anexo ·</a:t>
+            </a:r>
+            <a:r>
+              <a:rPr lang="es-MX" altLang="en-US" sz="1800" b="1" dirty="0">
+                <a:solidFill>
+                  <a:srgbClr val="FFFFFF"/>
+                </a:solidFill>
+                <a:latin typeface="Arial" panose="020B0604020202020204" pitchFamily="34" charset="0"/>
+                <a:ea typeface="Arial" panose="020B0604020202020204" pitchFamily="34" charset="-122"/>
+                <a:cs typeface="Arial" panose="020B0604020202020204" pitchFamily="34" charset="-120"/>
+              </a:rPr>
+              <a:t>Enlace De </a:t>
+            </a:r>
+            <a:r>
+              <a:rPr lang="en-US" sz="1800" b="1" dirty="0">
+                <a:solidFill>
+                  <a:srgbClr val="FFFFFF"/>
+                </a:solidFill>
+                <a:latin typeface="Arial" panose="020B0604020202020204" pitchFamily="34" charset="0"/>
+                <a:ea typeface="Arial" panose="020B0604020202020204" pitchFamily="34" charset="-122"/>
+                <a:cs typeface="Arial" panose="020B0604020202020204" pitchFamily="34" charset="-120"/>
+              </a:rPr>
+              <a:t>Git</a:t>
             </a:r>
             <a:endParaRPr lang="en-US" sz="1800" dirty="0"/>
           </a:p>
@@ -11354,17 +11805,6 @@
             <a:pPr marL="0" indent="0" algn="ctr">
               <a:buNone/>
             </a:pPr>
-            <a:r>
-              <a:rPr lang="en-US" sz="1400" b="1" dirty="0">
-                <a:solidFill>
-                  <a:srgbClr val="1A237E"/>
-                </a:solidFill>
-                <a:latin typeface="Arial" panose="020B0604020202020204" pitchFamily="34" charset="0"/>
-                <a:ea typeface="Arial" panose="020B0604020202020204" pitchFamily="34" charset="-122"/>
-                <a:cs typeface="Arial" panose="020B0604020202020204" pitchFamily="34" charset="-120"/>
-              </a:rPr>
-              <a:t>Estructura sugerida del repositorio</a:t>
-            </a:r>
             <a:endParaRPr lang="en-US" sz="1400" dirty="0"/>
           </a:p>
         </p:txBody>
@@ -11392,68 +11832,6 @@
             <a:pPr marL="0" indent="0">
               <a:buNone/>
             </a:pPr>
-            <a:r>
-              <a:rPr lang="en-US" sz="1300" dirty="0">
-                <a:solidFill>
-                  <a:srgbClr val="333333"/>
-                </a:solidFill>
-                <a:latin typeface="Consolas" panose="020B0609020204030204" pitchFamily="34" charset="0"/>
-                <a:ea typeface="Consolas" panose="020B0609020204030204" pitchFamily="34" charset="-122"/>
-                <a:cs typeface="Consolas" panose="020B0609020204030204" pitchFamily="34" charset="-120"/>
-              </a:rPr>
-              <a:t>SimulacionBloquera/</a:t>
-            </a:r>
-            <a:endParaRPr lang="en-US" sz="1300" dirty="0"/>
-          </a:p>
-          <a:p>
-            <a:pPr marL="0" indent="0">
-              <a:buNone/>
-            </a:pPr>
-            <a:r>
-              <a:rPr lang="en-US" sz="1300" dirty="0">
-                <a:solidFill>
-                  <a:srgbClr val="333333"/>
-                </a:solidFill>
-                <a:latin typeface="Consolas" panose="020B0609020204030204" pitchFamily="34" charset="0"/>
-                <a:ea typeface="Consolas" panose="020B0609020204030204" pitchFamily="34" charset="-122"/>
-                <a:cs typeface="Consolas" panose="020B0609020204030204" pitchFamily="34" charset="-120"/>
-              </a:rPr>
-              <a:t>  src/main/java/.../MainApplication, Launcher, controller/, model/</a:t>
-            </a:r>
-            <a:endParaRPr lang="en-US" sz="1300" dirty="0"/>
-          </a:p>
-          <a:p>
-            <a:pPr marL="0" indent="0">
-              <a:buNone/>
-            </a:pPr>
-            <a:r>
-              <a:rPr lang="en-US" sz="1300" dirty="0">
-                <a:solidFill>
-                  <a:srgbClr val="333333"/>
-                </a:solidFill>
-                <a:latin typeface="Consolas" panose="020B0609020204030204" pitchFamily="34" charset="0"/>
-                <a:ea typeface="Consolas" panose="020B0609020204030204" pitchFamily="34" charset="-122"/>
-                <a:cs typeface="Consolas" panose="020B0609020204030204" pitchFamily="34" charset="-120"/>
-              </a:rPr>
-              <a:t>  src/main/resources/.../main-view.fxml</a:t>
-            </a:r>
-            <a:endParaRPr lang="en-US" sz="1300" dirty="0"/>
-          </a:p>
-          <a:p>
-            <a:pPr marL="0" indent="0">
-              <a:buNone/>
-            </a:pPr>
-            <a:r>
-              <a:rPr lang="en-US" sz="1300" dirty="0">
-                <a:solidFill>
-                  <a:srgbClr val="333333"/>
-                </a:solidFill>
-                <a:latin typeface="Consolas" panose="020B0609020204030204" pitchFamily="34" charset="0"/>
-                <a:ea typeface="Consolas" panose="020B0609020204030204" pitchFamily="34" charset="-122"/>
-                <a:cs typeface="Consolas" panose="020B0609020204030204" pitchFamily="34" charset="-120"/>
-              </a:rPr>
-              <a:t>  pom.xml · module-info.java · README.md · diagramas/*.bpmn · .gitignore</a:t>
-            </a:r>
             <a:endParaRPr lang="en-US" sz="1300" dirty="0"/>
           </a:p>
         </p:txBody>
@@ -11481,17 +11859,6 @@
             <a:pPr marL="0" indent="0" algn="ctr">
               <a:buNone/>
             </a:pPr>
-            <a:r>
-              <a:rPr lang="en-US" sz="1400" b="1" dirty="0">
-                <a:solidFill>
-                  <a:srgbClr val="1A237E"/>
-                </a:solidFill>
-                <a:latin typeface="Arial" panose="020B0604020202020204" pitchFamily="34" charset="0"/>
-                <a:ea typeface="Arial" panose="020B0604020202020204" pitchFamily="34" charset="-122"/>
-                <a:cs typeface="Arial" panose="020B0604020202020204" pitchFamily="34" charset="-120"/>
-              </a:rPr>
-              <a:t>Comandos básicos</a:t>
-            </a:r>
             <a:endParaRPr lang="en-US" sz="1400" dirty="0"/>
           </a:p>
         </p:txBody>
@@ -11519,87 +11886,8 @@
             <a:pPr marL="0" indent="0">
               <a:buNone/>
             </a:pPr>
-            <a:r>
-              <a:rPr lang="en-US" sz="1300" dirty="0">
-                <a:solidFill>
-                  <a:srgbClr val="333333"/>
-                </a:solidFill>
-                <a:latin typeface="Consolas" panose="020B0609020204030204" pitchFamily="34" charset="0"/>
-                <a:ea typeface="Consolas" panose="020B0609020204030204" pitchFamily="34" charset="-122"/>
-                <a:cs typeface="Consolas" panose="020B0609020204030204" pitchFamily="34" charset="-120"/>
-              </a:rPr>
-              <a:t>git init</a:t>
-            </a:r>
             <a:endParaRPr lang="en-US" sz="1300" dirty="0"/>
           </a:p>
-          <a:p>
-            <a:pPr marL="0" indent="0">
-              <a:buNone/>
-            </a:pPr>
-            <a:r>
-              <a:rPr lang="en-US" sz="1300" dirty="0">
-                <a:solidFill>
-                  <a:srgbClr val="333333"/>
-                </a:solidFill>
-                <a:latin typeface="Consolas" panose="020B0609020204030204" pitchFamily="34" charset="0"/>
-                <a:ea typeface="Consolas" panose="020B0609020204030204" pitchFamily="34" charset="-122"/>
-                <a:cs typeface="Consolas" panose="020B0609020204030204" pitchFamily="34" charset="-120"/>
-              </a:rPr>
-              <a:t>git add .</a:t>
-            </a:r>
-            <a:endParaRPr lang="en-US" sz="1300" dirty="0"/>
-          </a:p>
-          <a:p>
-            <a:pPr marL="0" indent="0">
-              <a:buNone/>
-            </a:pPr>
-            <a:r>
-              <a:rPr lang="en-US" sz="1300" dirty="0">
-                <a:solidFill>
-                  <a:srgbClr val="333333"/>
-                </a:solidFill>
-                <a:latin typeface="Consolas" panose="020B0609020204030204" pitchFamily="34" charset="0"/>
-                <a:ea typeface="Consolas" panose="020B0609020204030204" pitchFamily="34" charset="-122"/>
-                <a:cs typeface="Consolas" panose="020B0609020204030204" pitchFamily="34" charset="-120"/>
-              </a:rPr>
-              <a:t>git commit -m "Simulacion JavaFX + diagramas BPMN Camunda Bonita Bizagi"</a:t>
-            </a:r>
-            <a:endParaRPr lang="en-US" sz="1300" dirty="0"/>
-          </a:p>
-          <a:p>
-            <a:pPr marL="0" indent="0">
-              <a:buNone/>
-            </a:pPr>
-            <a:r>
-              <a:rPr lang="en-US" sz="1300" dirty="0">
-                <a:solidFill>
-                  <a:srgbClr val="333333"/>
-                </a:solidFill>
-                <a:latin typeface="Consolas" panose="020B0609020204030204" pitchFamily="34" charset="0"/>
-                <a:ea typeface="Consolas" panose="020B0609020204030204" pitchFamily="34" charset="-122"/>
-                <a:cs typeface="Consolas" panose="020B0609020204030204" pitchFamily="34" charset="-120"/>
-              </a:rPr>
-              <a:t>git remote add origin &lt;url&gt;</a:t>
-            </a:r>
-            <a:endParaRPr lang="en-US" sz="1300" dirty="0"/>
-          </a:p>
-          <a:p>
-            <a:pPr marL="0" indent="0">
-              <a:buNone/>
-            </a:pPr>
-            <a:r>
-              <a:rPr lang="en-US" sz="1300" dirty="0">
-                <a:solidFill>
-                  <a:srgbClr val="333333"/>
-                </a:solidFill>
-                <a:latin typeface="Consolas" panose="020B0609020204030204" pitchFamily="34" charset="0"/>
-                <a:ea typeface="Consolas" panose="020B0609020204030204" pitchFamily="34" charset="-122"/>
-                <a:cs typeface="Consolas" panose="020B0609020204030204" pitchFamily="34" charset="-120"/>
-              </a:rPr>
-              <a:t>git push -u origin main</a:t>
-            </a:r>
-            <a:endParaRPr lang="en-US" sz="1300" dirty="0"/>
-          </a:p>
         </p:txBody>
       </p:sp>
       <p:sp>
@@ -11610,49 +11898,21 @@
         </p:nvSpPr>
         <p:spPr>
           <a:xfrm>
-            <a:off x="457200" y="4663440"/>
-            <a:ext cx="11247120" cy="822960"/>
-          </a:xfrm>
-          <a:prstGeom prst="rect">
-            <a:avLst/>
-          </a:prstGeom>
-          <a:noFill/>
-        </p:spPr>
-        <p:txBody>
-          <a:bodyPr wrap="square" rtlCol="0" anchor="ctr"/>
-          <a:lstStyle/>
-          <a:p>
-            <a:pPr marL="0" indent="0">
-              <a:buNone/>
-            </a:pPr>
-            <a:r>
-              <a:rPr lang="en-US" sz="1300" dirty="0">
-                <a:solidFill>
-                  <a:srgbClr val="546E7A"/>
-                </a:solidFill>
-                <a:latin typeface="Arial" panose="020B0604020202020204" pitchFamily="34" charset="0"/>
-                <a:ea typeface="Arial" panose="020B0604020202020204" pitchFamily="34" charset="-122"/>
-                <a:cs typeface="Arial" panose="020B0604020202020204" pitchFamily="34" charset="-120"/>
-              </a:rPr>
-              <a:t>Versionar código y .bpmn; no subir target/ ni .idea/workspace.xml. README con pasos del manual de usuario.</a:t>
-            </a:r>
-            <a:endParaRPr lang="en-US" sz="1300" dirty="0"/>
-          </a:p>
-          <a:p>
-            <a:pPr marL="0" indent="0">
-              <a:buNone/>
-            </a:pPr>
-            <a:r>
-              <a:rPr lang="en-US" sz="1300" dirty="0">
-                <a:solidFill>
-                  <a:srgbClr val="546E7A"/>
-                </a:solidFill>
-                <a:latin typeface="Arial" panose="020B0604020202020204" pitchFamily="34" charset="0"/>
-                <a:ea typeface="Arial" panose="020B0604020202020204" pitchFamily="34" charset="-122"/>
-                <a:cs typeface="Arial" panose="020B0604020202020204" pitchFamily="34" charset="-120"/>
-              </a:rPr>
-              <a:t>Etiquetas: v1-escenario1 · v2-dos-revolvedoras · entrega-final.</a:t>
-            </a:r>
+            <a:off x="457200" y="2743835"/>
+            <a:ext cx="11247120" cy="2742565"/>
+          </a:xfrm>
+          <a:prstGeom prst="rect">
+            <a:avLst/>
+          </a:prstGeom>
+          <a:noFill/>
+        </p:spPr>
+        <p:txBody>
+          <a:bodyPr wrap="square" rtlCol="0" anchor="ctr"/>
+          <a:lstStyle/>
+          <a:p>
+            <a:pPr marL="0" indent="0">
+              <a:buNone/>
+            </a:pPr>
             <a:endParaRPr lang="en-US" sz="1300" dirty="0"/>
           </a:p>
         </p:txBody>
@@ -11730,6 +11990,35 @@
               <a:t>22 / 26</a:t>
             </a:r>
             <a:endParaRPr lang="en-US" sz="900" dirty="0"/>
+          </a:p>
+        </p:txBody>
+      </p:sp>
+      <p:sp>
+        <p:nvSpPr>
+          <p:cNvPr id="11" name="Cuadro de texto 10"/>
+          <p:cNvSpPr txBox="1"/>
+          <p:nvPr/>
+        </p:nvSpPr>
+        <p:spPr>
+          <a:xfrm>
+            <a:off x="2588895" y="3125470"/>
+            <a:ext cx="5876290" cy="577215"/>
+          </a:xfrm>
+          <a:prstGeom prst="rect">
+            <a:avLst/>
+          </a:prstGeom>
+          <a:noFill/>
+        </p:spPr>
+        <p:txBody>
+          <a:bodyPr wrap="square" rtlCol="0">
+            <a:noAutofit/>
+          </a:bodyPr>
+          <a:p>
+            <a:r>
+              <a:rPr lang="en-US" altLang="es-MX"/>
+              <a:t>https://github.com/angelmalu18/Sim-Tema_5-031026.git</a:t>
+            </a:r>
+            <a:endParaRPr lang="en-US" altLang="es-MX"/>
           </a:p>
         </p:txBody>
       </p:sp>
@@ -12312,17 +12601,6 @@
             <a:pPr marL="0" indent="0" algn="ctr">
               <a:buNone/>
             </a:pPr>
-            <a:r>
-              <a:rPr lang="en-US" sz="3600" b="1" dirty="0">
-                <a:solidFill>
-                  <a:srgbClr val="FFFFFF"/>
-                </a:solidFill>
-                <a:latin typeface="Arial" panose="020B0604020202020204" pitchFamily="34" charset="0"/>
-                <a:ea typeface="Arial" panose="020B0604020202020204" pitchFamily="34" charset="-122"/>
-                <a:cs typeface="Arial" panose="020B0604020202020204" pitchFamily="34" charset="-120"/>
-              </a:rPr>
-              <a:t>Gracias</a:t>
-            </a:r>
             <a:endParaRPr lang="en-US" sz="3600" dirty="0"/>
           </a:p>
         </p:txBody>
